--- a/dashboard/Olist_Analysis_Dashboard.pptx
+++ b/dashboard/Olist_Analysis_Dashboard.pptx
@@ -3335,7 +3335,7 @@
           <p:cNvPr id="0" name="slide1">
             <a:extLst>
               <a:ext uri="{FF2B5EF4-FFF2-40B4-BE49-F238E27FC236}">
-                <a16:creationId xmlns:a16="http://schemas.microsoft.com/office/drawing/2014/main" id="{4D486A42-FF1C-4B6B-B705-E3CD3E7738DC}"/>
+                <a16:creationId xmlns:a16="http://schemas.microsoft.com/office/drawing/2014/main" id="{5332E154-62B5-4097-9975-5B8D6A9EA74A}"/>
               </a:ext>
             </a:extLst>
           </p:cNvPr>
@@ -3353,7 +3353,7 @@
           <a:p>
             <a:r>
               <a:rPr/>
-              <a:t>Olist_Analysis_Dashboard__2</a:t>
+              <a:t>Olist_Analysis_Dashboard</a:t>
             </a:r>
           </a:p>
         </p:txBody>
@@ -3363,7 +3363,7 @@
           <p:cNvPr id="1" name="slide1">
             <a:extLst>
               <a:ext uri="{FF2B5EF4-FFF2-40B4-BE49-F238E27FC236}">
-                <a16:creationId xmlns:a16="http://schemas.microsoft.com/office/drawing/2014/main" id="{5C915FB3-2026-4E5F-95DF-D91D7EA9863F}"/>
+                <a16:creationId xmlns:a16="http://schemas.microsoft.com/office/drawing/2014/main" id="{DC981540-5E05-490E-876E-4C55D4BCDA9D}"/>
               </a:ext>
             </a:extLst>
           </p:cNvPr>
@@ -3381,7 +3381,7 @@
           <a:p>
             <a:r>
               <a:rPr/>
-              <a:t>File created on: 18.05.2026 18:37:07 IST</a:t>
+              <a:t>File created on: 25.05.2026 19:06:32 IST</a:t>
             </a:r>
           </a:p>
         </p:txBody>
@@ -3418,10 +3418,10 @@
       </p:grpSpPr>
       <p:pic>
         <p:nvPicPr>
-          <p:cNvPr descr="H3-The KPI Card" id="10" name="slide10">
-            <a:extLst>
-              <a:ext uri="{FF2B5EF4-FFF2-40B4-BE49-F238E27FC236}">
-                <a16:creationId xmlns:a16="http://schemas.microsoft.com/office/drawing/2014/main" id="{DD2B58E7-58C3-4158-B45C-B0974B6B9D9C}"/>
+          <p:cNvPr descr="sellers-by-state" id="10" name="slide10">
+            <a:extLst>
+              <a:ext uri="{FF2B5EF4-FFF2-40B4-BE49-F238E27FC236}">
+                <a16:creationId xmlns:a16="http://schemas.microsoft.com/office/drawing/2014/main" id="{205D04B8-0AF3-438E-BB99-CC826A90A6B9}"/>
               </a:ext>
             </a:extLst>
           </p:cNvPr>
@@ -3444,8 +3444,8 @@
         </p:blipFill>
         <p:spPr>
           <a:xfrm>
-            <a:off x="4371975" y="2790825"/>
-            <a:ext cx="3448050" cy="1276350"/>
+            <a:off x="1019175" y="95250"/>
+            <a:ext cx="10153650" cy="6667500"/>
           </a:xfrm>
           <a:prstGeom prst="rect">
             <a:avLst/>
@@ -3484,10 +3484,10 @@
       </p:grpSpPr>
       <p:pic>
         <p:nvPicPr>
-          <p:cNvPr descr="MonthlyGrowth" id="2" name="slide2">
-            <a:extLst>
-              <a:ext uri="{FF2B5EF4-FFF2-40B4-BE49-F238E27FC236}">
-                <a16:creationId xmlns:a16="http://schemas.microsoft.com/office/drawing/2014/main" id="{F7DB3751-0661-49B6-9BDD-729AECFD11AC}"/>
+          <p:cNvPr descr="Olist E-Commerce Dashboard" id="2" name="slide2">
+            <a:extLst>
+              <a:ext uri="{FF2B5EF4-FFF2-40B4-BE49-F238E27FC236}">
+                <a16:creationId xmlns:a16="http://schemas.microsoft.com/office/drawing/2014/main" id="{7144E854-21DF-4D04-97E1-F9CD697FCE4A}"/>
               </a:ext>
             </a:extLst>
           </p:cNvPr>
@@ -3510,8 +3510,8 @@
         </p:blipFill>
         <p:spPr>
           <a:xfrm>
-            <a:off x="1100137" y="138112"/>
-            <a:ext cx="9991725" cy="6581775"/>
+            <a:off x="952500" y="0"/>
+            <a:ext cx="10287000" cy="6858000"/>
           </a:xfrm>
           <a:prstGeom prst="rect">
             <a:avLst/>
@@ -3550,10 +3550,10 @@
       </p:grpSpPr>
       <p:pic>
         <p:nvPicPr>
-          <p:cNvPr descr="H2-RevenueByState" id="3" name="slide3">
-            <a:extLst>
-              <a:ext uri="{FF2B5EF4-FFF2-40B4-BE49-F238E27FC236}">
-                <a16:creationId xmlns:a16="http://schemas.microsoft.com/office/drawing/2014/main" id="{123C756C-FBFB-4108-BC20-6C30ABD8D3C2}"/>
+          <p:cNvPr descr="MonthlyGrowth" id="3" name="slide3">
+            <a:extLst>
+              <a:ext uri="{FF2B5EF4-FFF2-40B4-BE49-F238E27FC236}">
+                <a16:creationId xmlns:a16="http://schemas.microsoft.com/office/drawing/2014/main" id="{014FBE50-FBC5-4483-9334-7898328F6879}"/>
               </a:ext>
             </a:extLst>
           </p:cNvPr>
@@ -3576,8 +3576,8 @@
         </p:blipFill>
         <p:spPr>
           <a:xfrm>
-            <a:off x="1985962" y="261937"/>
-            <a:ext cx="8220075" cy="6334125"/>
+            <a:off x="766762" y="95250"/>
+            <a:ext cx="10658475" cy="6667500"/>
           </a:xfrm>
           <a:prstGeom prst="rect">
             <a:avLst/>
@@ -3619,7 +3619,7 @@
           <p:cNvPr descr="H1-DelaySeverityvsScore" id="4" name="slide4">
             <a:extLst>
               <a:ext uri="{FF2B5EF4-FFF2-40B4-BE49-F238E27FC236}">
-                <a16:creationId xmlns:a16="http://schemas.microsoft.com/office/drawing/2014/main" id="{90E48457-7ECE-43C7-8A98-88C518284E00}"/>
+                <a16:creationId xmlns:a16="http://schemas.microsoft.com/office/drawing/2014/main" id="{CB45C181-9C6C-471E-8B73-8B0C9AED3B60}"/>
               </a:ext>
             </a:extLst>
           </p:cNvPr>
@@ -3642,8 +3642,8 @@
         </p:blipFill>
         <p:spPr>
           <a:xfrm>
-            <a:off x="1509712" y="176212"/>
-            <a:ext cx="9172575" cy="6505575"/>
+            <a:off x="1509712" y="95250"/>
+            <a:ext cx="9172575" cy="6667500"/>
           </a:xfrm>
           <a:prstGeom prst="rect">
             <a:avLst/>
@@ -3682,10 +3682,10 @@
       </p:grpSpPr>
       <p:pic>
         <p:nvPicPr>
-          <p:cNvPr descr="Olist E-Commerce Dashboard" id="5" name="slide5">
-            <a:extLst>
-              <a:ext uri="{FF2B5EF4-FFF2-40B4-BE49-F238E27FC236}">
-                <a16:creationId xmlns:a16="http://schemas.microsoft.com/office/drawing/2014/main" id="{0DF45824-D6E1-46BB-BA8D-D023EF761795}"/>
+          <p:cNvPr descr="H2-RevenueByState" id="5" name="slide5">
+            <a:extLst>
+              <a:ext uri="{FF2B5EF4-FFF2-40B4-BE49-F238E27FC236}">
+                <a16:creationId xmlns:a16="http://schemas.microsoft.com/office/drawing/2014/main" id="{E30C6E8C-418C-486C-8F58-AAAC4423DF16}"/>
               </a:ext>
             </a:extLst>
           </p:cNvPr>
@@ -3708,8 +3708,8 @@
         </p:blipFill>
         <p:spPr>
           <a:xfrm>
-            <a:off x="952500" y="0"/>
-            <a:ext cx="10287000" cy="6858000"/>
+            <a:off x="1985962" y="261937"/>
+            <a:ext cx="8220075" cy="6334125"/>
           </a:xfrm>
           <a:prstGeom prst="rect">
             <a:avLst/>
@@ -3748,10 +3748,10 @@
       </p:grpSpPr>
       <p:pic>
         <p:nvPicPr>
-          <p:cNvPr descr="customers-by-state" id="6" name="slide6">
-            <a:extLst>
-              <a:ext uri="{FF2B5EF4-FFF2-40B4-BE49-F238E27FC236}">
-                <a16:creationId xmlns:a16="http://schemas.microsoft.com/office/drawing/2014/main" id="{DDDFFC45-9A36-40E3-A210-BE9C8FBD1A29}"/>
+          <p:cNvPr descr="H3-The KPI Card" id="6" name="slide6">
+            <a:extLst>
+              <a:ext uri="{FF2B5EF4-FFF2-40B4-BE49-F238E27FC236}">
+                <a16:creationId xmlns:a16="http://schemas.microsoft.com/office/drawing/2014/main" id="{95BE951E-E096-43DC-BFDF-12DFC1B77C20}"/>
               </a:ext>
             </a:extLst>
           </p:cNvPr>
@@ -3774,8 +3774,8 @@
         </p:blipFill>
         <p:spPr>
           <a:xfrm>
-            <a:off x="1447800" y="152400"/>
-            <a:ext cx="9296400" cy="6553200"/>
+            <a:off x="4371975" y="2790825"/>
+            <a:ext cx="3448050" cy="1276350"/>
           </a:xfrm>
           <a:prstGeom prst="rect">
             <a:avLst/>
@@ -3814,10 +3814,10 @@
       </p:grpSpPr>
       <p:pic>
         <p:nvPicPr>
-          <p:cNvPr descr="sellers-by-state" id="7" name="slide7">
-            <a:extLst>
-              <a:ext uri="{FF2B5EF4-FFF2-40B4-BE49-F238E27FC236}">
-                <a16:creationId xmlns:a16="http://schemas.microsoft.com/office/drawing/2014/main" id="{73BE965A-EE14-4745-B35A-2E688AEC2ABA}"/>
+          <p:cNvPr descr="H3-GMV Pareto Distribution" id="7" name="slide7">
+            <a:extLst>
+              <a:ext uri="{FF2B5EF4-FFF2-40B4-BE49-F238E27FC236}">
+                <a16:creationId xmlns:a16="http://schemas.microsoft.com/office/drawing/2014/main" id="{199A2BD8-5844-459A-A203-6546856B641C}"/>
               </a:ext>
             </a:extLst>
           </p:cNvPr>
@@ -3840,8 +3840,8 @@
         </p:blipFill>
         <p:spPr>
           <a:xfrm>
-            <a:off x="1352550" y="152400"/>
-            <a:ext cx="9486900" cy="6553200"/>
+            <a:off x="2428875" y="328612"/>
+            <a:ext cx="7334250" cy="6200775"/>
           </a:xfrm>
           <a:prstGeom prst="rect">
             <a:avLst/>
@@ -3883,7 +3883,7 @@
           <p:cNvPr descr="H4-Freight%ByState" id="8" name="slide8">
             <a:extLst>
               <a:ext uri="{FF2B5EF4-FFF2-40B4-BE49-F238E27FC236}">
-                <a16:creationId xmlns:a16="http://schemas.microsoft.com/office/drawing/2014/main" id="{8C4EC079-A353-4BE9-B340-F097AA5BD313}"/>
+                <a16:creationId xmlns:a16="http://schemas.microsoft.com/office/drawing/2014/main" id="{11281A94-28D6-4033-B397-22283F21D690}"/>
               </a:ext>
             </a:extLst>
           </p:cNvPr>
@@ -3906,8 +3906,8 @@
         </p:blipFill>
         <p:spPr>
           <a:xfrm>
-            <a:off x="1076325" y="176212"/>
-            <a:ext cx="10039350" cy="6505575"/>
+            <a:off x="1076325" y="95250"/>
+            <a:ext cx="10039350" cy="6667500"/>
           </a:xfrm>
           <a:prstGeom prst="rect">
             <a:avLst/>
@@ -3946,10 +3946,10 @@
       </p:grpSpPr>
       <p:pic>
         <p:nvPicPr>
-          <p:cNvPr descr="H3-GMV Pareto Distribution" id="9" name="slide9">
-            <a:extLst>
-              <a:ext uri="{FF2B5EF4-FFF2-40B4-BE49-F238E27FC236}">
-                <a16:creationId xmlns:a16="http://schemas.microsoft.com/office/drawing/2014/main" id="{A6EE21A0-6EF9-4308-9BA2-8D9224D67DE0}"/>
+          <p:cNvPr descr="customers-by-state" id="9" name="slide9">
+            <a:extLst>
+              <a:ext uri="{FF2B5EF4-FFF2-40B4-BE49-F238E27FC236}">
+                <a16:creationId xmlns:a16="http://schemas.microsoft.com/office/drawing/2014/main" id="{5630DF1C-AE69-498C-845A-5DA2BF1C22D0}"/>
               </a:ext>
             </a:extLst>
           </p:cNvPr>
@@ -3972,8 +3972,8 @@
         </p:blipFill>
         <p:spPr>
           <a:xfrm>
-            <a:off x="2428875" y="328612"/>
-            <a:ext cx="7334250" cy="6200775"/>
+            <a:off x="1114425" y="95250"/>
+            <a:ext cx="9963150" cy="6667500"/>
           </a:xfrm>
           <a:prstGeom prst="rect">
             <a:avLst/>
